--- a/산출물/통합반/이론_오프라인/02회차/통합반_오프라인_02회차.pptx
+++ b/산출물/통합반/이론_오프라인/02회차/통합반_오프라인_02회차.pptx
@@ -1839,7 +1839,7 @@
           </a:p>
           <a:p>
             <a:r>
-              <a:t>[다음] SOP: 작업의 순서와 수행 기준</a:t>
+              <a:t>[다음] SOP</a:t>
             </a:r>
           </a:p>
         </p:txBody>
@@ -25991,7 +25991,7 @@
       </p:sp>
       <p:pic>
         <p:nvPicPr>
-          <p:cNvPr id="6" name="삽화:조치연결_그래프.svg" descr="illust_2874601984092123984_1793113376.png"/>
+          <p:cNvPr id="6" name="삽화:조치연결_그래프.svg" descr="illust_1743542526282189246_1793113376.png"/>
           <p:cNvPicPr>
             <a:picLocks noChangeAspect="1"/>
           </p:cNvPicPr>
@@ -30562,7 +30562,7 @@
       </p:sp>
       <p:pic>
         <p:nvPicPr>
-          <p:cNvPr id="6" name="삽화:공통식별자_2.svg" descr="illust_4055807707666348456_1793113376.png"/>
+          <p:cNvPr id="6" name="삽화:공통식별자_2.svg" descr="illust_595042768984317630_1793113376.png"/>
           <p:cNvPicPr>
             <a:picLocks noChangeAspect="1"/>
           </p:cNvPicPr>

--- a/산출물/통합반/이론_오프라인/02회차/통합반_오프라인_02회차.pptx
+++ b/산출물/통합반/이론_오프라인/02회차/통합반_오프라인_02회차.pptx
@@ -547,11 +547,6 @@
           </a:p>
           <a:p>
             <a:r>
-              <a:t>· 이론은 온라인 교재의 장에서 오늘 실습에 쓰는 것만</a:t>
-            </a:r>
-          </a:p>
-          <a:p>
-            <a:r>
               <a:t>[다음] 학습목표</a:t>
             </a:r>
           </a:p>
@@ -827,7 +822,7 @@
           </a:p>
           <a:p>
             <a:r>
-              <a:t>· 스키마 정의(정의 파일) → 인스턴스 데이터(예시 데이터) → 적재(식별자로 찾아 노드 · 관계 생성, 그래프) → 조회(처음 정한 역량 질문, 답의 행) → 검사(필수값 · 허용값 · 끝 클래스를 스키마와 대조)</a:t>
+              <a:t>· 스키마 정의(정의 파일) → 인스턴스 데이터(예시 데이터) → 적재(식별자로 찾아 노드 · 관계 생성, 그래프) → 조회(처음 정한 질문, 답의 행) → 검사(필수값 · 허용값 · 끝 클래스를 스키마와 대조)</a:t>
             </a:r>
           </a:p>
           <a:p>
@@ -1537,11 +1532,6 @@
           </a:p>
           <a:p>
             <a:r>
-              <a:t>· 실습에서 제공 SOP를 모델에 연결하고 원문과 대조한다</a:t>
-            </a:r>
-          </a:p>
-          <a:p>
-            <a:r>
               <a:t>[다음] SOP</a:t>
             </a:r>
           </a:p>
@@ -1622,7 +1612,7 @@
           </a:p>
           <a:p>
             <a:r>
-              <a:t>· 2 반복 적재: 넣다 멈춰 다시 돌려도 같은 대상이 하나 — 이어지는 실습의 핵심 확인</a:t>
+              <a:t>· 2 반복 적재: 넣다 멈춰 다시 돌려도 같은 대상이 하나</a:t>
             </a:r>
           </a:p>
           <a:p>
@@ -1632,7 +1622,7 @@
           </a:p>
           <a:p>
             <a:r>
-              <a:t>· 4 SOP 연결: 조치를 고를 때 순서 · 전제 · 금지 · 완료까지 함께 나오게 — SOP 연결 실습에서 직접 잇는다</a:t>
+              <a:t>· 4 SOP 연결: 조치를 고를 때 순서 · 전제 · 금지 · 완료까지 함께 나오게</a:t>
             </a:r>
           </a:p>
           <a:p>
@@ -2142,12 +2132,12 @@
           </a:p>
           <a:p>
             <a:r>
-              <a:t>· 원인 → 고장 유형 「일으킨다」. 근본 조치는 원인마다 다르니 원인 한정 조치 → 원인 관계를 따로(이 조치가 이 원인에 맞는다) → 핀 오염인데 환기 보강을 추천하지 않으려면 이 연결까지 확인</a:t>
-            </a:r>
-          </a:p>
-          <a:p>
-            <a:r>
-              <a:t>· 고장 유형이 길 한가운데: 원인을 아직 못 가려도 고장 유형만 알면 완화 후보를 찾고, 원인이 가려지면 맞는 근본 조치가 더해진다(지식 그래프 지도에서 고장 유형이 가운데였던 까닭)</a:t>
+              <a:t>· 원인 → 고장 유형 「일으킨다」. 근본 조치는 원인마다 다르니 원인 한정 조치 → 원인 관계를 따로(이 조치가 이 원인에 맞는다) → 원인에 맞지 않는 근본 조치를 추천하지 않으려면 이 연결까지 확인</a:t>
+            </a:r>
+          </a:p>
+          <a:p>
+            <a:r>
+              <a:t>· 고장 유형이 길 한가운데: 원인을 아직 못 가려도 고장 유형만 알면 완화 후보를 찾고, 원인이 가려지면 맞는 근본 조치가 더해진다</a:t>
             </a:r>
           </a:p>
           <a:p>
@@ -2157,7 +2147,7 @@
           </a:p>
           <a:p>
             <a:r>
-              <a:t>· 아래 띠를 문장으로: 냉각 성능 상실에 팬 최대 운전으로 대응하고, 단계는 매뉴얼에 근거하며, 운전원이 승인한다. 철자보다 문장이 성립하는지. 쿨러 사건 추천안에도 원인 → 고장 유형 → 완화 조치의 길과 근거 절이 그대로 적혔다</a:t>
+              <a:t>· 아래 띠를 문장으로: 냉각 성능 상실에 팬 최대 운전으로 대응하고, 단계는 매뉴얼에 근거하며, 운전원이 승인한다. 철자보다 문장이 성립하는지</a:t>
             </a:r>
           </a:p>
           <a:p>
@@ -2332,12 +2322,12 @@
           <a:lstStyle/>
           <a:p>
             <a:r>
-              <a:t>[짚을 곳] 표 여덟 줄을 위에서부터, 정식 명칭은 화면에 맡기고 뜻만</a:t>
-            </a:r>
-          </a:p>
-          <a:p>
-            <a:r>
-              <a:t>· 스키마 = 클래스 · 속성 · 관계 · 제약의 정의, 인스턴스 = 그 정의에 맞춰 적은 실제 대상 하나</a:t>
+              <a:t>[짚을 곳] 표 아홉 줄을 위에서부터, 정식 명칭은 화면에 맡기고 뜻만</a:t>
+            </a:r>
+          </a:p>
+          <a:p>
+            <a:r>
+              <a:t>· 클래스 = 공통 특성을 가진 대상의 유형, 스키마 = 클래스 · 속성 · 관계 · 제약의 정의, 인스턴스 = 그 정의에 맞춰 적은 실제 대상 하나</a:t>
             </a:r>
           </a:p>
           <a:p>
@@ -2717,7 +2707,7 @@
           </a:p>
           <a:p>
             <a:r>
-              <a:t>· 04 모델에 작업 절차를 붙이는 구조 → 실습 셋으로</a:t>
+              <a:t>· 04 모델에 작업 절차를 붙이는 구조</a:t>
             </a:r>
           </a:p>
           <a:p>
@@ -2997,6 +2987,11 @@
           </a:p>
           <a:p>
             <a:r>
+              <a:t>· 클래스 = 공통 특성을 가진 대상의 유형(센서 · 상태 변수), 인스턴스 = 그 유형에 속하는 실제 개별 대상(유온 센서 하나)</a:t>
+            </a:r>
+          </a:p>
+          <a:p>
+            <a:r>
               <a:t>· 먼저 정의(스키마)와 실제 대상(인스턴스)을 가른 뒤, 대상을 가리키는 값을 정한다</a:t>
             </a:r>
           </a:p>
@@ -3398,11 +3393,6 @@
           <a:p>
             <a:r>
               <a:t>· CREATE · MERGE · SET의 차이 → 관계 잇기 → 넣은 뒤 확인까지</a:t>
-            </a:r>
-          </a:p>
-          <a:p>
-            <a:r>
-              <a:t>· 실습에서 같은 자료를 두 번 넣고 개수를 대조한다</a:t>
             </a:r>
           </a:p>
           <a:p>
@@ -23529,7 +23519,7 @@
       </p:sp>
       <p:pic>
         <p:nvPicPr>
-          <p:cNvPr id="6" name="삽화:조치연결_그래프.svg" descr="illust_8170892657131584316_1793113376.png"/>
+          <p:cNvPr id="6" name="삽화:조치연결_그래프.svg" descr="illust_6720966797159664315_1793113376.png"/>
           <p:cNvPicPr>
             <a:picLocks noChangeAspect="1"/>
           </p:cNvPicPr>
@@ -24959,7 +24949,7 @@
         </p:nvSpPr>
         <p:spPr>
           <a:xfrm>
-            <a:off x="548640" y="1627632"/>
+            <a:off x="548640" y="1627631"/>
             <a:ext cx="11094415" cy="347472"/>
           </a:xfrm>
           <a:prstGeom prst="roundRect">
@@ -24990,7 +24980,7 @@
         </p:nvSpPr>
         <p:spPr>
           <a:xfrm>
-            <a:off x="685800" y="1627632"/>
+            <a:off x="685800" y="1627631"/>
             <a:ext cx="2514600" cy="347472"/>
           </a:xfrm>
           <a:prstGeom prst="rect">
@@ -25029,7 +25019,7 @@
         </p:nvSpPr>
         <p:spPr>
           <a:xfrm>
-            <a:off x="3200400" y="1627632"/>
+            <a:off x="3200400" y="1627631"/>
             <a:ext cx="8442655" cy="347472"/>
           </a:xfrm>
           <a:prstGeom prst="rect">
@@ -25069,7 +25059,7 @@
         <p:spPr>
           <a:xfrm>
             <a:off x="548640" y="2061972"/>
-            <a:ext cx="11094415" cy="476631"/>
+            <a:ext cx="11094415" cy="416560"/>
           </a:xfrm>
           <a:prstGeom prst="roundRect">
             <a:avLst>
@@ -25099,8 +25089,8 @@
         </p:nvSpPr>
         <p:spPr>
           <a:xfrm>
-            <a:off x="685800" y="2029968"/>
-            <a:ext cx="2514600" cy="540639"/>
+            <a:off x="685800" y="2029967"/>
+            <a:ext cx="2514600" cy="480568"/>
           </a:xfrm>
           <a:prstGeom prst="rect">
             <a:avLst/>
@@ -25125,7 +25115,7 @@
                 <a:ea typeface="맑은 고딕"/>
                 <a:cs typeface="맑은 고딕"/>
               </a:rPr>
-              <a:t>스키마</a:t>
+              <a:t>클래스</a:t>
             </a:r>
           </a:p>
         </p:txBody>
@@ -25138,8 +25128,8 @@
         </p:nvSpPr>
         <p:spPr>
           <a:xfrm>
-            <a:off x="3200400" y="2029968"/>
-            <a:ext cx="8351215" cy="540639"/>
+            <a:off x="3200400" y="2029967"/>
+            <a:ext cx="8351215" cy="480568"/>
           </a:xfrm>
           <a:prstGeom prst="rect">
             <a:avLst/>
@@ -25156,7 +25146,7 @@
               </a:lnSpc>
             </a:pPr>
             <a:r>
-              <a:rPr sz="1400" b="0">
+              <a:rPr sz="1250" b="0">
                 <a:solidFill>
                   <a:srgbClr val="1F2A3A"/>
                 </a:solidFill>
@@ -25164,17 +25154,17 @@
                 <a:ea typeface="맑은 고딕"/>
                 <a:cs typeface="맑은 고딕"/>
               </a:rPr>
-              <a:t>Schema</a:t>
-            </a:r>
-          </a:p>
-          <a:p>
-            <a:pPr algn="l" eaLnBrk="0">
-              <a:lnSpc>
-                <a:spcPct val="110000"/>
-              </a:lnSpc>
-            </a:pPr>
-            <a:r>
-              <a:rPr sz="1400" b="0">
+              <a:t>Class</a:t>
+            </a:r>
+          </a:p>
+          <a:p>
+            <a:pPr algn="l" eaLnBrk="0">
+              <a:lnSpc>
+                <a:spcPct val="110000"/>
+              </a:lnSpc>
+            </a:pPr>
+            <a:r>
+              <a:rPr sz="1250" b="0">
                 <a:solidFill>
                   <a:srgbClr val="1F2A3A"/>
                 </a:solidFill>
@@ -25182,7 +25172,7 @@
                 <a:ea typeface="맑은 고딕"/>
                 <a:cs typeface="맑은 고딕"/>
               </a:rPr>
-              <a:t>클래스 · 속성 · 관계 · 제약을 일관되게 정한 지식 구조의 정의</a:t>
+              <a:t>공통 특성을 가진 대상의 유형</a:t>
             </a:r>
           </a:p>
         </p:txBody>
@@ -25195,8 +25185,8 @@
         </p:nvSpPr>
         <p:spPr>
           <a:xfrm>
-            <a:off x="548640" y="2602611"/>
-            <a:ext cx="11094415" cy="476631"/>
+            <a:off x="548640" y="2542540"/>
+            <a:ext cx="11094415" cy="416560"/>
           </a:xfrm>
           <a:prstGeom prst="roundRect">
             <a:avLst>
@@ -25226,8 +25216,8 @@
         </p:nvSpPr>
         <p:spPr>
           <a:xfrm>
-            <a:off x="685800" y="2570607"/>
-            <a:ext cx="2514600" cy="540639"/>
+            <a:off x="685800" y="2510536"/>
+            <a:ext cx="2514600" cy="480568"/>
           </a:xfrm>
           <a:prstGeom prst="rect">
             <a:avLst/>
@@ -25252,7 +25242,7 @@
                 <a:ea typeface="맑은 고딕"/>
                 <a:cs typeface="맑은 고딕"/>
               </a:rPr>
-              <a:t>인스턴스</a:t>
+              <a:t>스키마</a:t>
             </a:r>
           </a:p>
         </p:txBody>
@@ -25265,8 +25255,8 @@
         </p:nvSpPr>
         <p:spPr>
           <a:xfrm>
-            <a:off x="3200400" y="2570607"/>
-            <a:ext cx="8351215" cy="540639"/>
+            <a:off x="3200400" y="2510536"/>
+            <a:ext cx="8351215" cy="480568"/>
           </a:xfrm>
           <a:prstGeom prst="rect">
             <a:avLst/>
@@ -25283,7 +25273,7 @@
               </a:lnSpc>
             </a:pPr>
             <a:r>
-              <a:rPr sz="1400" b="0">
+              <a:rPr sz="1250" b="0">
                 <a:solidFill>
                   <a:srgbClr val="1F2A3A"/>
                 </a:solidFill>
@@ -25291,17 +25281,17 @@
                 <a:ea typeface="맑은 고딕"/>
                 <a:cs typeface="맑은 고딕"/>
               </a:rPr>
-              <a:t>Instance</a:t>
-            </a:r>
-          </a:p>
-          <a:p>
-            <a:pPr algn="l" eaLnBrk="0">
-              <a:lnSpc>
-                <a:spcPct val="110000"/>
-              </a:lnSpc>
-            </a:pPr>
-            <a:r>
-              <a:rPr sz="1400" b="0">
+              <a:t>Schema</a:t>
+            </a:r>
+          </a:p>
+          <a:p>
+            <a:pPr algn="l" eaLnBrk="0">
+              <a:lnSpc>
+                <a:spcPct val="110000"/>
+              </a:lnSpc>
+            </a:pPr>
+            <a:r>
+              <a:rPr sz="1250" b="0">
                 <a:solidFill>
                   <a:srgbClr val="1F2A3A"/>
                 </a:solidFill>
@@ -25309,7 +25299,7 @@
                 <a:ea typeface="맑은 고딕"/>
                 <a:cs typeface="맑은 고딕"/>
               </a:rPr>
-              <a:t>클래스에 속하는 실제 개별 대상</a:t>
+              <a:t>클래스 · 속성 · 관계 · 제약을 일관되게 정한 지식 구조의 정의</a:t>
             </a:r>
           </a:p>
         </p:txBody>
@@ -25322,8 +25312,8 @@
         </p:nvSpPr>
         <p:spPr>
           <a:xfrm>
-            <a:off x="548640" y="3143250"/>
-            <a:ext cx="11094415" cy="476631"/>
+            <a:off x="548640" y="3023108"/>
+            <a:ext cx="11094415" cy="416560"/>
           </a:xfrm>
           <a:prstGeom prst="roundRect">
             <a:avLst>
@@ -25353,8 +25343,8 @@
         </p:nvSpPr>
         <p:spPr>
           <a:xfrm>
-            <a:off x="685800" y="3111246"/>
-            <a:ext cx="2514600" cy="540639"/>
+            <a:off x="685800" y="2991104"/>
+            <a:ext cx="2514600" cy="480568"/>
           </a:xfrm>
           <a:prstGeom prst="rect">
             <a:avLst/>
@@ -25379,7 +25369,7 @@
                 <a:ea typeface="맑은 고딕"/>
                 <a:cs typeface="맑은 고딕"/>
               </a:rPr>
-              <a:t>식별자</a:t>
+              <a:t>인스턴스</a:t>
             </a:r>
           </a:p>
         </p:txBody>
@@ -25392,8 +25382,8 @@
         </p:nvSpPr>
         <p:spPr>
           <a:xfrm>
-            <a:off x="3200400" y="3111246"/>
-            <a:ext cx="8351215" cy="540639"/>
+            <a:off x="3200400" y="2991104"/>
+            <a:ext cx="8351215" cy="480568"/>
           </a:xfrm>
           <a:prstGeom prst="rect">
             <a:avLst/>
@@ -25410,7 +25400,7 @@
               </a:lnSpc>
             </a:pPr>
             <a:r>
-              <a:rPr sz="1400" b="0">
+              <a:rPr sz="1250" b="0">
                 <a:solidFill>
                   <a:srgbClr val="1F2A3A"/>
                 </a:solidFill>
@@ -25418,17 +25408,17 @@
                 <a:ea typeface="맑은 고딕"/>
                 <a:cs typeface="맑은 고딕"/>
               </a:rPr>
-              <a:t>Identifier</a:t>
-            </a:r>
-          </a:p>
-          <a:p>
-            <a:pPr algn="l" eaLnBrk="0">
-              <a:lnSpc>
-                <a:spcPct val="110000"/>
-              </a:lnSpc>
-            </a:pPr>
-            <a:r>
-              <a:rPr sz="1400" b="0">
+              <a:t>Instance</a:t>
+            </a:r>
+          </a:p>
+          <a:p>
+            <a:pPr algn="l" eaLnBrk="0">
+              <a:lnSpc>
+                <a:spcPct val="110000"/>
+              </a:lnSpc>
+            </a:pPr>
+            <a:r>
+              <a:rPr sz="1250" b="0">
                 <a:solidFill>
                   <a:srgbClr val="1F2A3A"/>
                 </a:solidFill>
@@ -25436,7 +25426,7 @@
                 <a:ea typeface="맑은 고딕"/>
                 <a:cs typeface="맑은 고딕"/>
               </a:rPr>
-              <a:t>같은 대상을 하나로 가리키는, 바뀌지 않는 고유한 값</a:t>
+              <a:t>클래스에 속하는 실제 개별 대상</a:t>
             </a:r>
           </a:p>
         </p:txBody>
@@ -25449,8 +25439,8 @@
         </p:nvSpPr>
         <p:spPr>
           <a:xfrm>
-            <a:off x="548640" y="3683888"/>
-            <a:ext cx="11094415" cy="476631"/>
+            <a:off x="548640" y="3503676"/>
+            <a:ext cx="11094415" cy="416560"/>
           </a:xfrm>
           <a:prstGeom prst="roundRect">
             <a:avLst>
@@ -25480,8 +25470,8 @@
         </p:nvSpPr>
         <p:spPr>
           <a:xfrm>
-            <a:off x="685800" y="3651885"/>
-            <a:ext cx="2514600" cy="540639"/>
+            <a:off x="685800" y="3471672"/>
+            <a:ext cx="2514600" cy="480568"/>
           </a:xfrm>
           <a:prstGeom prst="rect">
             <a:avLst/>
@@ -25506,7 +25496,7 @@
                 <a:ea typeface="맑은 고딕"/>
                 <a:cs typeface="맑은 고딕"/>
               </a:rPr>
-              <a:t>자료형</a:t>
+              <a:t>식별자</a:t>
             </a:r>
           </a:p>
         </p:txBody>
@@ -25519,8 +25509,8 @@
         </p:nvSpPr>
         <p:spPr>
           <a:xfrm>
-            <a:off x="3200400" y="3651885"/>
-            <a:ext cx="8351215" cy="540639"/>
+            <a:off x="3200400" y="3471672"/>
+            <a:ext cx="8351215" cy="480568"/>
           </a:xfrm>
           <a:prstGeom prst="rect">
             <a:avLst/>
@@ -25537,7 +25527,7 @@
               </a:lnSpc>
             </a:pPr>
             <a:r>
-              <a:rPr sz="1400" b="0">
+              <a:rPr sz="1250" b="0">
                 <a:solidFill>
                   <a:srgbClr val="1F2A3A"/>
                 </a:solidFill>
@@ -25545,17 +25535,17 @@
                 <a:ea typeface="맑은 고딕"/>
                 <a:cs typeface="맑은 고딕"/>
               </a:rPr>
-              <a:t>Data Type</a:t>
-            </a:r>
-          </a:p>
-          <a:p>
-            <a:pPr algn="l" eaLnBrk="0">
-              <a:lnSpc>
-                <a:spcPct val="110000"/>
-              </a:lnSpc>
-            </a:pPr>
-            <a:r>
-              <a:rPr sz="1400" b="0">
+              <a:t>Identifier</a:t>
+            </a:r>
+          </a:p>
+          <a:p>
+            <a:pPr algn="l" eaLnBrk="0">
+              <a:lnSpc>
+                <a:spcPct val="110000"/>
+              </a:lnSpc>
+            </a:pPr>
+            <a:r>
+              <a:rPr sz="1250" b="0">
                 <a:solidFill>
                   <a:srgbClr val="1F2A3A"/>
                 </a:solidFill>
@@ -25563,7 +25553,7 @@
                 <a:ea typeface="맑은 고딕"/>
                 <a:cs typeface="맑은 고딕"/>
               </a:rPr>
-              <a:t>칸에 들어갈 값의 종류</a:t>
+              <a:t>같은 대상을 하나로 가리키는, 바뀌지 않는 고유한 값</a:t>
             </a:r>
           </a:p>
         </p:txBody>
@@ -25576,8 +25566,8 @@
         </p:nvSpPr>
         <p:spPr>
           <a:xfrm>
-            <a:off x="548640" y="4224528"/>
-            <a:ext cx="11094415" cy="476631"/>
+            <a:off x="548640" y="3984244"/>
+            <a:ext cx="11094415" cy="416560"/>
           </a:xfrm>
           <a:prstGeom prst="roundRect">
             <a:avLst>
@@ -25607,8 +25597,8 @@
         </p:nvSpPr>
         <p:spPr>
           <a:xfrm>
-            <a:off x="685800" y="4192524"/>
-            <a:ext cx="2514600" cy="540639"/>
+            <a:off x="685800" y="3952239"/>
+            <a:ext cx="2514600" cy="480568"/>
           </a:xfrm>
           <a:prstGeom prst="rect">
             <a:avLst/>
@@ -25633,7 +25623,7 @@
                 <a:ea typeface="맑은 고딕"/>
                 <a:cs typeface="맑은 고딕"/>
               </a:rPr>
-              <a:t>제약</a:t>
+              <a:t>자료형</a:t>
             </a:r>
           </a:p>
         </p:txBody>
@@ -25646,8 +25636,8 @@
         </p:nvSpPr>
         <p:spPr>
           <a:xfrm>
-            <a:off x="3200400" y="4192524"/>
-            <a:ext cx="8351215" cy="540639"/>
+            <a:off x="3200400" y="3952239"/>
+            <a:ext cx="8351215" cy="480568"/>
           </a:xfrm>
           <a:prstGeom prst="rect">
             <a:avLst/>
@@ -25664,7 +25654,7 @@
               </a:lnSpc>
             </a:pPr>
             <a:r>
-              <a:rPr sz="1400" b="0">
+              <a:rPr sz="1250" b="0">
                 <a:solidFill>
                   <a:srgbClr val="1F2A3A"/>
                 </a:solidFill>
@@ -25672,17 +25662,17 @@
                 <a:ea typeface="맑은 고딕"/>
                 <a:cs typeface="맑은 고딕"/>
               </a:rPr>
-              <a:t>Constraint</a:t>
-            </a:r>
-          </a:p>
-          <a:p>
-            <a:pPr algn="l" eaLnBrk="0">
-              <a:lnSpc>
-                <a:spcPct val="110000"/>
-              </a:lnSpc>
-            </a:pPr>
-            <a:r>
-              <a:rPr sz="1400" b="0">
+              <a:t>Data Type</a:t>
+            </a:r>
+          </a:p>
+          <a:p>
+            <a:pPr algn="l" eaLnBrk="0">
+              <a:lnSpc>
+                <a:spcPct val="110000"/>
+              </a:lnSpc>
+            </a:pPr>
+            <a:r>
+              <a:rPr sz="1250" b="0">
                 <a:solidFill>
                   <a:srgbClr val="1F2A3A"/>
                 </a:solidFill>
@@ -25690,7 +25680,7 @@
                 <a:ea typeface="맑은 고딕"/>
                 <a:cs typeface="맑은 고딕"/>
               </a:rPr>
-              <a:t>데이터가 지켜야 할 조건으로, 어긋난 데이터를 가려내는 기준</a:t>
+              <a:t>칸에 들어갈 값의 종류</a:t>
             </a:r>
           </a:p>
         </p:txBody>
@@ -25703,8 +25693,8 @@
         </p:nvSpPr>
         <p:spPr>
           <a:xfrm>
-            <a:off x="548640" y="4765167"/>
-            <a:ext cx="11094415" cy="476631"/>
+            <a:off x="548640" y="4464811"/>
+            <a:ext cx="11094415" cy="416560"/>
           </a:xfrm>
           <a:prstGeom prst="roundRect">
             <a:avLst>
@@ -25734,8 +25724,8 @@
         </p:nvSpPr>
         <p:spPr>
           <a:xfrm>
-            <a:off x="685800" y="4733163"/>
-            <a:ext cx="2514600" cy="540639"/>
+            <a:off x="685800" y="4432807"/>
+            <a:ext cx="2514600" cy="480568"/>
           </a:xfrm>
           <a:prstGeom prst="rect">
             <a:avLst/>
@@ -25760,7 +25750,7 @@
                 <a:ea typeface="맑은 고딕"/>
                 <a:cs typeface="맑은 고딕"/>
               </a:rPr>
-              <a:t>DB 제약</a:t>
+              <a:t>제약</a:t>
             </a:r>
           </a:p>
         </p:txBody>
@@ -25773,8 +25763,8 @@
         </p:nvSpPr>
         <p:spPr>
           <a:xfrm>
-            <a:off x="3200400" y="4733163"/>
-            <a:ext cx="8351215" cy="540639"/>
+            <a:off x="3200400" y="4432807"/>
+            <a:ext cx="8351215" cy="480568"/>
           </a:xfrm>
           <a:prstGeom prst="rect">
             <a:avLst/>
@@ -25791,7 +25781,7 @@
               </a:lnSpc>
             </a:pPr>
             <a:r>
-              <a:rPr sz="1400" b="0">
+              <a:rPr sz="1250" b="0">
                 <a:solidFill>
                   <a:srgbClr val="1F2A3A"/>
                 </a:solidFill>
@@ -25799,17 +25789,17 @@
                 <a:ea typeface="맑은 고딕"/>
                 <a:cs typeface="맑은 고딕"/>
               </a:rPr>
-              <a:t>DB Constraint</a:t>
-            </a:r>
-          </a:p>
-          <a:p>
-            <a:pPr algn="l" eaLnBrk="0">
-              <a:lnSpc>
-                <a:spcPct val="110000"/>
-              </a:lnSpc>
-            </a:pPr>
-            <a:r>
-              <a:rPr sz="1400" b="0">
+              <a:t>Constraint</a:t>
+            </a:r>
+          </a:p>
+          <a:p>
+            <a:pPr algn="l" eaLnBrk="0">
+              <a:lnSpc>
+                <a:spcPct val="110000"/>
+              </a:lnSpc>
+            </a:pPr>
+            <a:r>
+              <a:rPr sz="1250" b="0">
                 <a:solidFill>
                   <a:srgbClr val="1F2A3A"/>
                 </a:solidFill>
@@ -25817,7 +25807,7 @@
                 <a:ea typeface="맑은 고딕"/>
                 <a:cs typeface="맑은 고딕"/>
               </a:rPr>
-              <a:t>데이터베이스가 저장할 때 강제하는 규칙</a:t>
+              <a:t>데이터가 지켜야 할 조건으로, 어긋난 데이터를 가려내는 기준</a:t>
             </a:r>
           </a:p>
         </p:txBody>
@@ -25830,8 +25820,8 @@
         </p:nvSpPr>
         <p:spPr>
           <a:xfrm>
-            <a:off x="548640" y="5305806"/>
-            <a:ext cx="11094415" cy="476631"/>
+            <a:off x="548640" y="4945380"/>
+            <a:ext cx="11094415" cy="416560"/>
           </a:xfrm>
           <a:prstGeom prst="roundRect">
             <a:avLst>
@@ -25861,8 +25851,8 @@
         </p:nvSpPr>
         <p:spPr>
           <a:xfrm>
-            <a:off x="685800" y="5273802"/>
-            <a:ext cx="2514600" cy="540639"/>
+            <a:off x="685800" y="4913376"/>
+            <a:ext cx="2514600" cy="480568"/>
           </a:xfrm>
           <a:prstGeom prst="rect">
             <a:avLst/>
@@ -25887,7 +25877,7 @@
                 <a:ea typeface="맑은 고딕"/>
                 <a:cs typeface="맑은 고딕"/>
               </a:rPr>
-              <a:t>SOP</a:t>
+              <a:t>DB 제약</a:t>
             </a:r>
           </a:p>
         </p:txBody>
@@ -25900,8 +25890,8 @@
         </p:nvSpPr>
         <p:spPr>
           <a:xfrm>
-            <a:off x="3200400" y="5273802"/>
-            <a:ext cx="8351215" cy="540639"/>
+            <a:off x="3200400" y="4913376"/>
+            <a:ext cx="8351215" cy="480568"/>
           </a:xfrm>
           <a:prstGeom prst="rect">
             <a:avLst/>
@@ -25918,7 +25908,7 @@
               </a:lnSpc>
             </a:pPr>
             <a:r>
-              <a:rPr sz="1400" b="0">
+              <a:rPr sz="1250" b="0">
                 <a:solidFill>
                   <a:srgbClr val="1F2A3A"/>
                 </a:solidFill>
@@ -25926,17 +25916,17 @@
                 <a:ea typeface="맑은 고딕"/>
                 <a:cs typeface="맑은 고딕"/>
               </a:rPr>
-              <a:t>Standard Operating Procedure</a:t>
-            </a:r>
-          </a:p>
-          <a:p>
-            <a:pPr algn="l" eaLnBrk="0">
-              <a:lnSpc>
-                <a:spcPct val="110000"/>
-              </a:lnSpc>
-            </a:pPr>
-            <a:r>
-              <a:rPr sz="1400" b="0">
+              <a:t>DB Constraint</a:t>
+            </a:r>
+          </a:p>
+          <a:p>
+            <a:pPr algn="l" eaLnBrk="0">
+              <a:lnSpc>
+                <a:spcPct val="110000"/>
+              </a:lnSpc>
+            </a:pPr>
+            <a:r>
+              <a:rPr sz="1250" b="0">
                 <a:solidFill>
                   <a:srgbClr val="1F2A3A"/>
                 </a:solidFill>
@@ -25944,7 +25934,7 @@
                 <a:ea typeface="맑은 고딕"/>
                 <a:cs typeface="맑은 고딕"/>
               </a:rPr>
-              <a:t>작업의 순서와 전제 · 안전 · 금지 · 완료 기준을 정한 표준 작업 절차</a:t>
+              <a:t>데이터베이스가 저장할 때 강제하는 규칙</a:t>
             </a:r>
           </a:p>
         </p:txBody>
@@ -25957,8 +25947,8 @@
         </p:nvSpPr>
         <p:spPr>
           <a:xfrm>
-            <a:off x="548640" y="5846445"/>
-            <a:ext cx="11094415" cy="476631"/>
+            <a:off x="548640" y="5425948"/>
+            <a:ext cx="11094415" cy="416560"/>
           </a:xfrm>
           <a:prstGeom prst="roundRect">
             <a:avLst>
@@ -25988,8 +25978,8 @@
         </p:nvSpPr>
         <p:spPr>
           <a:xfrm>
-            <a:off x="685800" y="5814441"/>
-            <a:ext cx="2514600" cy="540639"/>
+            <a:off x="685800" y="5393944"/>
+            <a:ext cx="2514600" cy="480568"/>
           </a:xfrm>
           <a:prstGeom prst="rect">
             <a:avLst/>
@@ -26014,7 +26004,7 @@
                 <a:ea typeface="맑은 고딕"/>
                 <a:cs typeface="맑은 고딕"/>
               </a:rPr>
-              <a:t>LOTO</a:t>
+              <a:t>SOP</a:t>
             </a:r>
           </a:p>
         </p:txBody>
@@ -26027,8 +26017,8 @@
         </p:nvSpPr>
         <p:spPr>
           <a:xfrm>
-            <a:off x="3200400" y="5814441"/>
-            <a:ext cx="8351215" cy="540639"/>
+            <a:off x="3200400" y="5393944"/>
+            <a:ext cx="8351215" cy="480568"/>
           </a:xfrm>
           <a:prstGeom prst="rect">
             <a:avLst/>
@@ -26045,7 +26035,7 @@
               </a:lnSpc>
             </a:pPr>
             <a:r>
-              <a:rPr sz="1400" b="0">
+              <a:rPr sz="1250" b="0">
                 <a:solidFill>
                   <a:srgbClr val="1F2A3A"/>
                 </a:solidFill>
@@ -26053,6 +26043,133 @@
                 <a:ea typeface="맑은 고딕"/>
                 <a:cs typeface="맑은 고딕"/>
               </a:rPr>
+              <a:t>Standard Operating Procedure</a:t>
+            </a:r>
+          </a:p>
+          <a:p>
+            <a:pPr algn="l" eaLnBrk="0">
+              <a:lnSpc>
+                <a:spcPct val="110000"/>
+              </a:lnSpc>
+            </a:pPr>
+            <a:r>
+              <a:rPr sz="1250" b="0">
+                <a:solidFill>
+                  <a:srgbClr val="1F2A3A"/>
+                </a:solidFill>
+                <a:latin typeface="맑은 고딕"/>
+                <a:ea typeface="맑은 고딕"/>
+                <a:cs typeface="맑은 고딕"/>
+              </a:rPr>
+              <a:t>작업의 순서와 전제 · 안전 · 금지 · 완료 기준을 정한 표준 작업 절차</a:t>
+            </a:r>
+          </a:p>
+        </p:txBody>
+      </p:sp>
+      <p:sp>
+        <p:nvSpPr>
+          <p:cNvPr id="33" name="Rounded Rectangle 32"/>
+          <p:cNvSpPr/>
+          <p:nvPr/>
+        </p:nvSpPr>
+        <p:spPr>
+          <a:xfrm>
+            <a:off x="548640" y="5906516"/>
+            <a:ext cx="11094415" cy="416560"/>
+          </a:xfrm>
+          <a:prstGeom prst="roundRect">
+            <a:avLst>
+              <a:gd name="adj" fmla="val 8000"/>
+            </a:avLst>
+          </a:prstGeom>
+          <a:solidFill>
+            <a:srgbClr val="F3F6F9"/>
+          </a:solidFill>
+          <a:ln>
+            <a:noFill/>
+          </a:ln>
+        </p:spPr>
+        <p:txBody>
+          <a:bodyPr rtlCol="0" anchor="ctr"/>
+          <a:lstStyle/>
+          <a:p>
+            <a:pPr algn="ctr"/>
+          </a:p>
+        </p:txBody>
+      </p:sp>
+      <p:sp>
+        <p:nvSpPr>
+          <p:cNvPr id="34" name="TextBox 33"/>
+          <p:cNvSpPr txBox="1"/>
+          <p:nvPr/>
+        </p:nvSpPr>
+        <p:spPr>
+          <a:xfrm>
+            <a:off x="685800" y="5874512"/>
+            <a:ext cx="2514600" cy="480568"/>
+          </a:xfrm>
+          <a:prstGeom prst="rect">
+            <a:avLst/>
+          </a:prstGeom>
+          <a:noFill/>
+        </p:spPr>
+        <p:txBody>
+          <a:bodyPr wrap="square" anchor="ctr"/>
+          <a:lstStyle/>
+          <a:p>
+            <a:pPr algn="l" eaLnBrk="0">
+              <a:lnSpc>
+                <a:spcPct val="110000"/>
+              </a:lnSpc>
+            </a:pPr>
+            <a:r>
+              <a:rPr sz="1450" b="1">
+                <a:solidFill>
+                  <a:srgbClr val="13294B"/>
+                </a:solidFill>
+                <a:latin typeface="맑은 고딕"/>
+                <a:ea typeface="맑은 고딕"/>
+                <a:cs typeface="맑은 고딕"/>
+              </a:rPr>
+              <a:t>LOTO</a:t>
+            </a:r>
+          </a:p>
+        </p:txBody>
+      </p:sp>
+      <p:sp>
+        <p:nvSpPr>
+          <p:cNvPr id="35" name="TextBox 34"/>
+          <p:cNvSpPr txBox="1"/>
+          <p:nvPr/>
+        </p:nvSpPr>
+        <p:spPr>
+          <a:xfrm>
+            <a:off x="3200400" y="5874512"/>
+            <a:ext cx="8351215" cy="480568"/>
+          </a:xfrm>
+          <a:prstGeom prst="rect">
+            <a:avLst/>
+          </a:prstGeom>
+          <a:noFill/>
+        </p:spPr>
+        <p:txBody>
+          <a:bodyPr wrap="square" anchor="ctr"/>
+          <a:lstStyle/>
+          <a:p>
+            <a:pPr algn="l" eaLnBrk="0">
+              <a:lnSpc>
+                <a:spcPct val="110000"/>
+              </a:lnSpc>
+            </a:pPr>
+            <a:r>
+              <a:rPr sz="1250" b="0">
+                <a:solidFill>
+                  <a:srgbClr val="1F2A3A"/>
+                </a:solidFill>
+                <a:latin typeface="맑은 고딕"/>
+                <a:ea typeface="맑은 고딕"/>
+                <a:cs typeface="맑은 고딕"/>
+              </a:rPr>
               <a:t>Lockout/Tagout</a:t>
             </a:r>
           </a:p>
@@ -26063,7 +26180,7 @@
               </a:lnSpc>
             </a:pPr>
             <a:r>
-              <a:rPr sz="1400" b="0">
+              <a:rPr sz="1250" b="0">
                 <a:solidFill>
                   <a:srgbClr val="1F2A3A"/>
                 </a:solidFill>
@@ -32519,7 +32636,7 @@
       </p:sp>
       <p:pic>
         <p:nvPicPr>
-          <p:cNvPr id="6" name="삽화:공통식별자_2.svg" descr="illust_1112785328805055864_1793113376.png"/>
+          <p:cNvPr id="6" name="삽화:공통식별자_2.svg" descr="illust_9027313340488163135_1793113376.png"/>
           <p:cNvPicPr>
             <a:picLocks noChangeAspect="1"/>
           </p:cNvPicPr>
